--- a/reports/other-states-sir-2026-deck.pptx
+++ b/reports/other-states-sir-2026-deck.pptx
@@ -2884,7 +2884,7 @@
       </p:sp>
       <p:pic>
         <p:nvPicPr>
-          <p:cNvPr id="4" name="Image 0" descr="/tmp/pack-8Tsy5x/other-manipur-0.png">    </p:cNvPr>
+          <p:cNvPr id="4" name="Image 0" descr="/tmp/pack-7qNEwO/other-manipur-0.png">    </p:cNvPr>
           <p:cNvPicPr>
             <a:picLocks noChangeAspect="1"/>
           </p:cNvPicPr>
@@ -3057,7 +3057,7 @@
       </p:sp>
       <p:pic>
         <p:nvPicPr>
-          <p:cNvPr id="4" name="Image 0" descr="/tmp/pack-8Tsy5x/other-meghalaya-0.png">    </p:cNvPr>
+          <p:cNvPr id="4" name="Image 0" descr="/tmp/pack-7qNEwO/other-meghalaya-0.png">    </p:cNvPr>
           <p:cNvPicPr>
             <a:picLocks noChangeAspect="1"/>
           </p:cNvPicPr>
@@ -3230,7 +3230,7 @@
       </p:sp>
       <p:pic>
         <p:nvPicPr>
-          <p:cNvPr id="4" name="Image 0" descr="/tmp/pack-8Tsy5x/other-mizoram-0.png">    </p:cNvPr>
+          <p:cNvPr id="4" name="Image 0" descr="/tmp/pack-7qNEwO/other-mizoram-0.png">    </p:cNvPr>
           <p:cNvPicPr>
             <a:picLocks noChangeAspect="1"/>
           </p:cNvPicPr>
@@ -3403,7 +3403,7 @@
       </p:sp>
       <p:pic>
         <p:nvPicPr>
-          <p:cNvPr id="4" name="Image 0" descr="/tmp/pack-8Tsy5x/other-nagaland-0.png">    </p:cNvPr>
+          <p:cNvPr id="4" name="Image 0" descr="/tmp/pack-7qNEwO/other-nagaland-0.png">    </p:cNvPr>
           <p:cNvPicPr>
             <a:picLocks noChangeAspect="1"/>
           </p:cNvPicPr>
@@ -3576,7 +3576,7 @@
       </p:sp>
       <p:pic>
         <p:nvPicPr>
-          <p:cNvPr id="4" name="Image 0" descr="/tmp/pack-8Tsy5x/other-sikkim-0.png">    </p:cNvPr>
+          <p:cNvPr id="4" name="Image 0" descr="/tmp/pack-7qNEwO/other-sikkim-0.png">    </p:cNvPr>
           <p:cNvPicPr>
             <a:picLocks noChangeAspect="1"/>
           </p:cNvPicPr>
@@ -3749,7 +3749,7 @@
       </p:sp>
       <p:pic>
         <p:nvPicPr>
-          <p:cNvPr id="4" name="Image 0" descr="/tmp/pack-8Tsy5x/other-arunachal-0.png">    </p:cNvPr>
+          <p:cNvPr id="4" name="Image 0" descr="/tmp/pack-7qNEwO/other-arunachal-0.png">    </p:cNvPr>
           <p:cNvPicPr>
             <a:picLocks noChangeAspect="1"/>
           </p:cNvPicPr>
@@ -4075,7 +4075,7 @@
       </p:sp>
       <p:pic>
         <p:nvPicPr>
-          <p:cNvPr id="4" name="Image 0" descr="/tmp/pack-8Tsy5x/other-puducherry-0.png">    </p:cNvPr>
+          <p:cNvPr id="4" name="Image 0" descr="/tmp/pack-7qNEwO/other-puducherry-0.png">    </p:cNvPr>
           <p:cNvPicPr>
             <a:picLocks noChangeAspect="1"/>
           </p:cNvPicPr>
@@ -4248,7 +4248,7 @@
       </p:sp>
       <p:pic>
         <p:nvPicPr>
-          <p:cNvPr id="4" name="Image 0" descr="/tmp/pack-8Tsy5x/other-chandigarh-0.png">    </p:cNvPr>
+          <p:cNvPr id="4" name="Image 0" descr="/tmp/pack-7qNEwO/other-chandigarh-0.png">    </p:cNvPr>
           <p:cNvPicPr>
             <a:picLocks noChangeAspect="1"/>
           </p:cNvPicPr>
@@ -4421,7 +4421,7 @@
       </p:sp>
       <p:pic>
         <p:nvPicPr>
-          <p:cNvPr id="4" name="Image 0" descr="/tmp/pack-8Tsy5x/other-lakshadweep-0.png">    </p:cNvPr>
+          <p:cNvPr id="4" name="Image 0" descr="/tmp/pack-7qNEwO/other-lakshadweep-0.png">    </p:cNvPr>
           <p:cNvPicPr>
             <a:picLocks noChangeAspect="1"/>
           </p:cNvPicPr>
@@ -4594,7 +4594,7 @@
       </p:sp>
       <p:pic>
         <p:nvPicPr>
-          <p:cNvPr id="4" name="Image 0" descr="/tmp/pack-8Tsy5x/other-chhattisgarh-0.png">    </p:cNvPr>
+          <p:cNvPr id="4" name="Image 0" descr="/tmp/pack-7qNEwO/other-chhattisgarh-0.png">    </p:cNvPr>
           <p:cNvPicPr>
             <a:picLocks noChangeAspect="1"/>
           </p:cNvPicPr>
@@ -4767,7 +4767,7 @@
       </p:sp>
       <p:pic>
         <p:nvPicPr>
-          <p:cNvPr id="4" name="Image 0" descr="/tmp/pack-8Tsy5x/other-andaman-0.png">    </p:cNvPr>
+          <p:cNvPr id="4" name="Image 0" descr="/tmp/pack-7qNEwO/other-andaman-0.png">    </p:cNvPr>
           <p:cNvPicPr>
             <a:picLocks noChangeAspect="1"/>
           </p:cNvPicPr>
@@ -4940,7 +4940,7 @@
       </p:sp>
       <p:pic>
         <p:nvPicPr>
-          <p:cNvPr id="4" name="Image 0" descr="/tmp/pack-8Tsy5x/other-dnhdd-0.png">    </p:cNvPr>
+          <p:cNvPr id="4" name="Image 0" descr="/tmp/pack-7qNEwO/other-dnhdd-0.png">    </p:cNvPr>
           <p:cNvPicPr>
             <a:picLocks noChangeAspect="1"/>
           </p:cNvPicPr>
@@ -5113,7 +5113,7 @@
       </p:sp>
       <p:pic>
         <p:nvPicPr>
-          <p:cNvPr id="4" name="Image 0" descr="/tmp/pack-8Tsy5x/other-madhyapradesh-0.png">    </p:cNvPr>
+          <p:cNvPr id="4" name="Image 0" descr="/tmp/pack-7qNEwO/other-madhyapradesh-0.png">    </p:cNvPr>
           <p:cNvPicPr>
             <a:picLocks noChangeAspect="1"/>
           </p:cNvPicPr>
@@ -5286,7 +5286,7 @@
       </p:sp>
       <p:pic>
         <p:nvPicPr>
-          <p:cNvPr id="4" name="Image 0" descr="/tmp/pack-8Tsy5x/other-andhrapradesh-0.png">    </p:cNvPr>
+          <p:cNvPr id="4" name="Image 0" descr="/tmp/pack-7qNEwO/other-andhrapradesh-0.png">    </p:cNvPr>
           <p:cNvPicPr>
             <a:picLocks noChangeAspect="1"/>
           </p:cNvPicPr>
@@ -5459,7 +5459,7 @@
       </p:sp>
       <p:pic>
         <p:nvPicPr>
-          <p:cNvPr id="4" name="Image 0" descr="/tmp/pack-8Tsy5x/other-odisha-0.png">    </p:cNvPr>
+          <p:cNvPr id="4" name="Image 0" descr="/tmp/pack-7qNEwO/other-odisha-0.png">    </p:cNvPr>
           <p:cNvPicPr>
             <a:picLocks noChangeAspect="1"/>
           </p:cNvPicPr>
@@ -5632,7 +5632,7 @@
       </p:sp>
       <p:pic>
         <p:nvPicPr>
-          <p:cNvPr id="4" name="Image 0" descr="/tmp/pack-8Tsy5x/other-jharkhand-0.png">    </p:cNvPr>
+          <p:cNvPr id="4" name="Image 0" descr="/tmp/pack-7qNEwO/other-jharkhand-0.png">    </p:cNvPr>
           <p:cNvPicPr>
             <a:picLocks noChangeAspect="1"/>
           </p:cNvPicPr>
@@ -5805,7 +5805,7 @@
       </p:sp>
       <p:pic>
         <p:nvPicPr>
-          <p:cNvPr id="4" name="Image 0" descr="/tmp/pack-8Tsy5x/other-haryana-0.png">    </p:cNvPr>
+          <p:cNvPr id="4" name="Image 0" descr="/tmp/pack-7qNEwO/other-haryana-0.png">    </p:cNvPr>
           <p:cNvPicPr>
             <a:picLocks noChangeAspect="1"/>
           </p:cNvPicPr>
@@ -5978,7 +5978,7 @@
       </p:sp>
       <p:pic>
         <p:nvPicPr>
-          <p:cNvPr id="4" name="Image 0" descr="/tmp/pack-8Tsy5x/other-punjab-0.png">    </p:cNvPr>
+          <p:cNvPr id="4" name="Image 0" descr="/tmp/pack-7qNEwO/other-punjab-0.png">    </p:cNvPr>
           <p:cNvPicPr>
             <a:picLocks noChangeAspect="1"/>
           </p:cNvPicPr>
@@ -6151,7 +6151,7 @@
       </p:sp>
       <p:pic>
         <p:nvPicPr>
-          <p:cNvPr id="4" name="Image 0" descr="/tmp/pack-8Tsy5x/other-goa-0.png">    </p:cNvPr>
+          <p:cNvPr id="4" name="Image 0" descr="/tmp/pack-7qNEwO/other-goa-0.png">    </p:cNvPr>
           <p:cNvPicPr>
             <a:picLocks noChangeAspect="1"/>
           </p:cNvPicPr>

--- a/reports/other-states-sir-2026-deck.pptx
+++ b/reports/other-states-sir-2026-deck.pptx
@@ -610,7 +610,7 @@
           <a:p>
             <a:r>
               <a:rPr lang="en-US" dirty="0"/>
-              <a:t>Manipur's draft roll of 5 July 2026 left off 1.59 lakh names, 7.6 of every 100 electors on the roll before the revision. 68.2% of the names left off were entered as shifted, absent or for another reason, 27.1% as dead and 4.7% as enrolled more than once. The final roll of 6 September 2026 holds 19.61 lakh electors. After the draft 56,871 names were added and 30,650 removed, and the net rise is 16.5 for every 100 left off. It counts people enrolling for the first time, so fewer than that were put back. Women were 56.0% of the names left off and 51.7% of the roll before the revision, 8.2 of every 100 women against 6.9 of every 100 men.</a:t>
+              <a:t>Manipur's draft roll of 5 July 2026 left off 1.59 lakh names, 7.6 of every 100 electors on the roll before the revision. 68.2% of the names left off were entered as shifted, absent or for another reason, 27.1% as dead and 4.7% as enrolled more than once. The final roll of 6 September 2026 holds 19.61 lakh electors. After the draft 56,871 names were added and 30,650 deleted, and the net rise is 16.5 for every 100 left off. It counts people enrolling for the first time, so fewer than that were put back. Women were 56.0% of the names left off and 51.7% of the roll before the revision, 8.2 of every 100 women against 6.9 of every 100 men.</a:t>
             </a:r>
             <a:endParaRPr lang="en-US" dirty="0"/>
           </a:p>
@@ -786,7 +786,7 @@
           <a:p>
             <a:r>
               <a:rPr lang="en-US" dirty="0"/>
-              <a:t>Mizoram's draft roll of 4 July 2026 left off 46,162 names, 5.3 of every 100 electors on the roll before the revision. 49.0% of the names left off were entered as shifted, absent or for another reason, 46.1% as dead and 4.9% as enrolled more than once. The final roll of 7 September 2026 holds 8.36 lakh electors. After the draft 39,243 names were added and 32,280 removed, and the net rise is 15.1 for every 100 left off. It counts people enrolling for the first time, so fewer than that were put back. Women are 51.8% of the final roll. No split of the names left off by sex was found.</a:t>
+              <a:t>Mizoram's draft roll of 4 July 2026 left off 46,162 names, 5.3 of every 100 electors on the roll before the revision. 49.0% of the names left off were entered as shifted, absent or for another reason, 46.1% as dead and 4.9% as enrolled more than once. The final roll of 7 September 2026 holds 8.36 lakh electors. After the draft 39,243 names were added and 32,280 deleted, and the net rise is 15.1 for every 100 left off. It counts people enrolling for the first time, so fewer than that were put back. Women are 51.8% of the final roll. No split of the names left off by sex was found.</a:t>
             </a:r>
             <a:endParaRPr lang="en-US" dirty="0"/>
           </a:p>
@@ -962,7 +962,7 @@
           <a:p>
             <a:r>
               <a:rPr lang="en-US" dirty="0"/>
-              <a:t>Sikkim's draft roll of 5 July 2026 left off 37,724 names, 8.0 of every 100 electors on the roll before the revision. 64.9% of the names left off were entered as shifted, absent or for another reason, 28.7% as dead and 6.3% as enrolled more than once. The final roll of 6 September 2026 holds 4.18 lakh electors. After the draft 1,982 names were added and 16,809 removed, so the roll fell by a further 14,827 after the draft. Women are 49.2% of the final roll. No split of the names left off by sex was found.</a:t>
+              <a:t>Sikkim's draft roll of 5 July 2026 left off 37,724 names, 8.0 of every 100 electors on the roll before the revision. 64.9% of the names left off were entered as shifted, absent or for another reason, 28.7% as dead and 6.3% as enrolled more than once. The final roll of 6 September 2026 holds 4.18 lakh electors. After the draft 1,982 names were added and 16,809 deleted, so the roll fell by a further 14,827 after the draft. Women are 49.2% of the final roll. No split of the names left off by sex was found.</a:t>
             </a:r>
             <a:endParaRPr lang="en-US" dirty="0"/>
           </a:p>
@@ -1050,7 +1050,7 @@
           <a:p>
             <a:r>
               <a:rPr lang="en-US" dirty="0"/>
-              <a:t>Arunachal Pradesh's draft roll of 21 July 2026 left off 1.69 lakh names, 19.1 of every 100 electors on the roll before the revision. 82.0% of the names left off were entered as shifted, absent or for another reason, 15.1% as dead and 2.9% as enrolled more than once. The final roll of 22 September 2026 holds 6.96 lakh electors. After the draft 8,803 names were added and 30,823 removed, so the roll fell by a further 22,020 after the draft. Women are 50.6% of the final roll. No split of the names left off by sex was found.</a:t>
+              <a:t>Arunachal Pradesh's draft roll of 21 July 2026 left off 1.69 lakh names, 19.1 of every 100 electors on the roll before the revision. 82.0% of the names left off were entered as shifted, absent or for another reason, 15.1% as dead and 2.9% as enrolled more than once. The final roll of 22 September 2026 holds 6.96 lakh electors. After the draft 8,803 names were added and 30,823 deleted, so the roll fell by a further 22,020 after the draft. Women are 50.6% of the final roll. No split of the names left off by sex was found.</a:t>
             </a:r>
             <a:endParaRPr lang="en-US" dirty="0"/>
           </a:p>
@@ -1226,7 +1226,7 @@
           <a:p>
             <a:r>
               <a:rPr lang="en-US" dirty="0"/>
-              <a:t>Puducherry's draft roll of 16 December 2025 left off 1.03 lakh names, 10.1 of every 100 electors on the roll before the revision. 77.9% of the names left off were entered as shifted, absent or for another reason, 20.1% as dead and 2.0% as enrolled more than once. The final roll of 14 February 2026 holds 9.44 lakh electors. After the draft 42,719 names were added and 16,619 removed, and the net rise is 25.2 for every 100 left off. It counts people enrolling for the first time, so fewer than that were put back. Women are 53.0% of the final roll. No split of the names left off by sex was found.</a:t>
+              <a:t>Puducherry's draft roll of 16 December 2025 left off 1.03 lakh names, 10.1 of every 100 electors on the roll before the revision. 77.9% of the names left off were entered as shifted, absent or for another reason, 20.1% as dead and 2.0% as enrolled more than once. The final roll of 14 February 2026 holds 9.44 lakh electors. After the draft 42,719 names were added and 16,619 deleted, and the net rise is 25.2 for every 100 left off. It counts people enrolling for the first time, so fewer than that were put back. Women are 53.0% of the final roll. No split of the names left off by sex was found.</a:t>
             </a:r>
             <a:endParaRPr lang="en-US" dirty="0"/>
           </a:p>
@@ -1314,7 +1314,7 @@
           <a:p>
             <a:r>
               <a:rPr lang="en-US" dirty="0"/>
-              <a:t>Chandigarh's draft roll of 21 July 2026 left off 66,145 names, 12.8 of every 100 electors on the roll before the revision, as reported in the press. 90.7% of the names left off were entered as shifted, absent or for another reason, 5.3% as dead and 3.9% as enrolled more than once. The final roll of 22 September 2026 holds 4.60 lakh electors. After the draft 15,117 names were added and 5,190 removed, and the net rise is 15.0 for every 100 left off. It counts people enrolling for the first time, so fewer than that were put back. Women are 49.0% of the final roll. No split of the names left off by sex was found.</a:t>
+              <a:t>Chandigarh's draft roll of 21 July 2026 left off 66,145 names, 12.8 of every 100 electors on the roll before the revision, as reported in the press. 90.7% of the names left off were entered as shifted, absent or for another reason, 5.3% as dead and 3.9% as enrolled more than once. The final roll of 22 September 2026 holds 4.60 lakh electors. After the draft 15,117 names were added and 5,190 deleted, and the net rise is 15.0 for every 100 left off. It counts people enrolling for the first time, so fewer than that were put back. Women are 49.0% of the final roll. No split of the names left off by sex was found.</a:t>
             </a:r>
             <a:endParaRPr lang="en-US" dirty="0"/>
           </a:p>
@@ -1402,7 +1402,7 @@
           <a:p>
             <a:r>
               <a:rPr lang="en-US" dirty="0"/>
-              <a:t>Lakshadweep's draft roll of 16 December 2025 left off 1,429 names, 2.5 of every 100 electors on the roll before the revision. 17.6% of the names left off were entered as shifted, absent or for another reason, 49.3% as dead and 33.0% as enrolled more than once. The final roll of 14 February 2026 holds 57,607 electors. After the draft 1,270 names were added and 47 removed, and the net rise is 85.6 for every 100 left off. It counts people enrolling for the first time, so fewer than that were put back. Women are 49.3% of the final roll. No split of the names left off by sex was found.</a:t>
+              <a:t>Lakshadweep's draft roll of 16 December 2025 left off 1,429 names, 2.5 of every 100 electors on the roll before the revision. 17.6% of the names left off were entered as shifted, absent or for another reason, 49.3% as dead and 33.0% as enrolled more than once. The final roll of 14 February 2026 holds 57,607 electors. After the draft 1,270 names were added and 47 deleted, and the net rise is 85.6 for every 100 left off. It counts people enrolling for the first time, so fewer than that were put back. Women are 49.3% of the final roll. No split of the names left off by sex was found.</a:t>
             </a:r>
             <a:endParaRPr lang="en-US" dirty="0"/>
           </a:p>
@@ -1490,7 +1490,7 @@
           <a:p>
             <a:r>
               <a:rPr lang="en-US" dirty="0"/>
-              <a:t>Chhattisgarh's draft roll of 23 December 2025 left off 27.35 lakh names, 12.9 of every 100 electors on the roll before the revision. 70.0% of the names left off were entered as shifted, absent or for another reason, 23.5% as dead and 6.5% as enrolled more than once. The final roll of 21 February 2026 holds 1.87 crore electors. After the draft 3.44 lakh names were added and 1.09 lakh removed, and the net rise is 8.6 for every 100 left off. It counts people enrolling for the first time, so fewer than that were put back.</a:t>
+              <a:t>Chhattisgarh's draft roll of 23 December 2025 left off 27.35 lakh names, 12.9 of every 100 electors on the roll before the revision. 70.0% of the names left off were entered as shifted, absent or for another reason, 23.5% as dead and 6.5% as enrolled more than once. The final roll of 21 February 2026 holds 1.87 crore electors. After the draft 3.44 lakh names were added and 1.09 lakh deleted, and the net rise is 8.6 for every 100 left off. It counts people enrolling for the first time, so fewer than that were put back.</a:t>
             </a:r>
             <a:endParaRPr lang="en-US" dirty="0"/>
           </a:p>
@@ -1578,7 +1578,7 @@
           <a:p>
             <a:r>
               <a:rPr lang="en-US" dirty="0"/>
-              <a:t>The Andaman and Nicobar Islands' draft roll of 23 December 2025 left off 64,014 names, 20.6 of every 100 electors on the roll before the revision, as reported in the press. 81.1% of the names left off were entered as shifted, absent or for another reason, 14.4% as dead and 4.6% as enrolled more than once. The final roll of 21 February 2026 holds 2.58 lakh electors. After the draft 16,919 names were added and 5,269 removed, and the net rise is 18.2 for every 100 left off. It counts people enrolling for the first time, so fewer than that were put back. Women are 49.5% of the final roll. No split of the names left off by sex was found.</a:t>
+              <a:t>The Andaman and Nicobar Islands' draft roll of 23 December 2025 left off 64,014 names, 20.6 of every 100 electors on the roll before the revision, as reported in the press. 81.1% of the names left off were entered as shifted, absent or for another reason, 14.4% as dead and 4.6% as enrolled more than once. The final roll of 21 February 2026 holds 2.58 lakh electors. After the draft 16,919 names were added and 5,269 deleted, and the net rise is 18.2 for every 100 left off. It counts people enrolling for the first time, so fewer than that were put back. Women are 49.5% of the final roll. No split of the names left off by sex was found.</a:t>
             </a:r>
             <a:endParaRPr lang="en-US" dirty="0"/>
           </a:p>
@@ -1930,7 +1930,7 @@
           <a:p>
             <a:r>
               <a:rPr lang="en-US" dirty="0"/>
-              <a:t>Odisha's draft roll of 5 July 2026 left off 20.13 lakh names, 6.0 of every 100 electors on the roll before the revision, as reported in the press. 50.8% of the names left off were entered as shifted, absent or for another reason, 41.4% as dead and 7.9% as enrolled more than once. The final roll of 21 September 2026 holds 3.16 crore electors. After the draft 2.90 lakh names were added and 44,777 removed, and the net rise is 12.2 for every 100 left off. It counts people enrolling for the first time, so fewer than that were put back. Women were 56.9% of the names left off and 49.4% of the roll before the revision, 6.9 of every 100 women against 5.1 of every 100 men.</a:t>
+              <a:t>Odisha's draft roll of 5 July 2026 left off 20.13 lakh names, 6.0 of every 100 electors on the roll before the revision, as reported in the press. 50.8% of the names left off were entered as shifted, absent or for another reason, 41.4% as dead and 7.9% as enrolled more than once. The final roll of 21 September 2026 holds 3.16 crore electors. After the draft 2.90 lakh names were added and 44,777 deleted, and the net rise is 12.2 for every 100 left off. It counts people enrolling for the first time, so fewer than that were put back. Women were 56.9% of the names left off and 49.4% of the roll before the revision, 6.9 of every 100 women against 5.1 of every 100 men.</a:t>
             </a:r>
             <a:endParaRPr lang="en-US" dirty="0"/>
           </a:p>
@@ -2282,7 +2282,7 @@
           <a:p>
             <a:r>
               <a:rPr lang="en-US" dirty="0"/>
-              <a:t>Goa's draft roll of 16 December 2025 left off 1.00 lakh names, 8.4 of every 100 electors on the roll before the revision. 72.4% of the names left off were entered as shifted, absent or for another reason, 25.6% as dead and 2.0% as enrolled more than once. The final roll of 21 February 2026 holds 10.58 lakh electors. After the draft 12,166 names were added and 39,592 removed, so the roll fell by a further 27,426 after the draft. Women were 49.5% of the names left off and 51.6% of the roll before the revision, 8.1 of every 100 women against 8.8 of every 100 men.</a:t>
+              <a:t>Goa's draft roll of 16 December 2025 left off 1.00 lakh names, 8.4 of every 100 electors on the roll before the revision. 72.4% of the names left off were entered as shifted, absent or for another reason, 25.6% as dead and 2.0% as enrolled more than once. The final roll of 21 February 2026 holds 10.58 lakh electors. After the draft 12,166 names were added and 39,592 deleted, so the roll fell by a further 27,426 after the draft. Women were 49.5% of the names left off and 51.6% of the roll before the revision, 8.1 of every 100 women against 8.8 of every 100 men.</a:t>
             </a:r>
             <a:endParaRPr lang="en-US" dirty="0"/>
           </a:p>
@@ -2884,7 +2884,7 @@
       </p:sp>
       <p:pic>
         <p:nvPicPr>
-          <p:cNvPr id="4" name="Image 0" descr="/tmp/pack-7qNEwO/other-manipur-0.png">    </p:cNvPr>
+          <p:cNvPr id="4" name="Image 0" descr="/tmp/pack-BpyxFC/other-manipur-1.png">    </p:cNvPr>
           <p:cNvPicPr>
             <a:picLocks noChangeAspect="1"/>
           </p:cNvPicPr>
@@ -2898,8 +2898,8 @@
         </p:blipFill>
         <p:spPr>
           <a:xfrm>
-            <a:off x="1452545" y="1691640"/>
-            <a:ext cx="9286606" cy="4617720"/>
+            <a:off x="1439647" y="1691640"/>
+            <a:ext cx="9312402" cy="4617720"/>
           </a:xfrm>
           <a:prstGeom prst="rect">
             <a:avLst/>
@@ -3057,7 +3057,7 @@
       </p:sp>
       <p:pic>
         <p:nvPicPr>
-          <p:cNvPr id="4" name="Image 0" descr="/tmp/pack-7qNEwO/other-meghalaya-0.png">    </p:cNvPr>
+          <p:cNvPr id="4" name="Image 0" descr="/tmp/pack-BpyxFC/other-meghalaya-1.png">    </p:cNvPr>
           <p:cNvPicPr>
             <a:picLocks noChangeAspect="1"/>
           </p:cNvPicPr>
@@ -3230,7 +3230,7 @@
       </p:sp>
       <p:pic>
         <p:nvPicPr>
-          <p:cNvPr id="4" name="Image 0" descr="/tmp/pack-7qNEwO/other-mizoram-0.png">    </p:cNvPr>
+          <p:cNvPr id="4" name="Image 0" descr="/tmp/pack-BpyxFC/other-mizoram-0.png">    </p:cNvPr>
           <p:cNvPicPr>
             <a:picLocks noChangeAspect="1"/>
           </p:cNvPicPr>
@@ -3403,7 +3403,7 @@
       </p:sp>
       <p:pic>
         <p:nvPicPr>
-          <p:cNvPr id="4" name="Image 0" descr="/tmp/pack-7qNEwO/other-nagaland-0.png">    </p:cNvPr>
+          <p:cNvPr id="4" name="Image 0" descr="/tmp/pack-BpyxFC/other-nagaland-0.png">    </p:cNvPr>
           <p:cNvPicPr>
             <a:picLocks noChangeAspect="1"/>
           </p:cNvPicPr>
@@ -3576,7 +3576,7 @@
       </p:sp>
       <p:pic>
         <p:nvPicPr>
-          <p:cNvPr id="4" name="Image 0" descr="/tmp/pack-7qNEwO/other-sikkim-0.png">    </p:cNvPr>
+          <p:cNvPr id="4" name="Image 0" descr="/tmp/pack-BpyxFC/other-sikkim-0.png">    </p:cNvPr>
           <p:cNvPicPr>
             <a:picLocks noChangeAspect="1"/>
           </p:cNvPicPr>
@@ -3749,7 +3749,7 @@
       </p:sp>
       <p:pic>
         <p:nvPicPr>
-          <p:cNvPr id="4" name="Image 0" descr="/tmp/pack-7qNEwO/other-arunachal-0.png">    </p:cNvPr>
+          <p:cNvPr id="4" name="Image 0" descr="/tmp/pack-BpyxFC/other-arunachal-0.png">    </p:cNvPr>
           <p:cNvPicPr>
             <a:picLocks noChangeAspect="1"/>
           </p:cNvPicPr>
@@ -4075,7 +4075,7 @@
       </p:sp>
       <p:pic>
         <p:nvPicPr>
-          <p:cNvPr id="4" name="Image 0" descr="/tmp/pack-7qNEwO/other-puducherry-0.png">    </p:cNvPr>
+          <p:cNvPr id="4" name="Image 0" descr="/tmp/pack-BpyxFC/other-puducherry-0.png">    </p:cNvPr>
           <p:cNvPicPr>
             <a:picLocks noChangeAspect="1"/>
           </p:cNvPicPr>
@@ -4248,7 +4248,7 @@
       </p:sp>
       <p:pic>
         <p:nvPicPr>
-          <p:cNvPr id="4" name="Image 0" descr="/tmp/pack-7qNEwO/other-chandigarh-0.png">    </p:cNvPr>
+          <p:cNvPr id="4" name="Image 0" descr="/tmp/pack-BpyxFC/other-chandigarh-0.png">    </p:cNvPr>
           <p:cNvPicPr>
             <a:picLocks noChangeAspect="1"/>
           </p:cNvPicPr>
@@ -4421,7 +4421,7 @@
       </p:sp>
       <p:pic>
         <p:nvPicPr>
-          <p:cNvPr id="4" name="Image 0" descr="/tmp/pack-7qNEwO/other-lakshadweep-0.png">    </p:cNvPr>
+          <p:cNvPr id="4" name="Image 0" descr="/tmp/pack-BpyxFC/other-lakshadweep-0.png">    </p:cNvPr>
           <p:cNvPicPr>
             <a:picLocks noChangeAspect="1"/>
           </p:cNvPicPr>
@@ -4594,7 +4594,7 @@
       </p:sp>
       <p:pic>
         <p:nvPicPr>
-          <p:cNvPr id="4" name="Image 0" descr="/tmp/pack-7qNEwO/other-chhattisgarh-0.png">    </p:cNvPr>
+          <p:cNvPr id="4" name="Image 0" descr="/tmp/pack-BpyxFC/other-chhattisgarh-0.png">    </p:cNvPr>
           <p:cNvPicPr>
             <a:picLocks noChangeAspect="1"/>
           </p:cNvPicPr>
@@ -4767,7 +4767,7 @@
       </p:sp>
       <p:pic>
         <p:nvPicPr>
-          <p:cNvPr id="4" name="Image 0" descr="/tmp/pack-7qNEwO/other-andaman-0.png">    </p:cNvPr>
+          <p:cNvPr id="4" name="Image 0" descr="/tmp/pack-BpyxFC/other-andaman-0.png">    </p:cNvPr>
           <p:cNvPicPr>
             <a:picLocks noChangeAspect="1"/>
           </p:cNvPicPr>
@@ -4940,7 +4940,7 @@
       </p:sp>
       <p:pic>
         <p:nvPicPr>
-          <p:cNvPr id="4" name="Image 0" descr="/tmp/pack-7qNEwO/other-dnhdd-0.png">    </p:cNvPr>
+          <p:cNvPr id="4" name="Image 0" descr="/tmp/pack-BpyxFC/other-dnhdd-0.png">    </p:cNvPr>
           <p:cNvPicPr>
             <a:picLocks noChangeAspect="1"/>
           </p:cNvPicPr>
@@ -5113,7 +5113,7 @@
       </p:sp>
       <p:pic>
         <p:nvPicPr>
-          <p:cNvPr id="4" name="Image 0" descr="/tmp/pack-7qNEwO/other-madhyapradesh-0.png">    </p:cNvPr>
+          <p:cNvPr id="4" name="Image 0" descr="/tmp/pack-BpyxFC/other-madhyapradesh-0.png">    </p:cNvPr>
           <p:cNvPicPr>
             <a:picLocks noChangeAspect="1"/>
           </p:cNvPicPr>
@@ -5286,7 +5286,7 @@
       </p:sp>
       <p:pic>
         <p:nvPicPr>
-          <p:cNvPr id="4" name="Image 0" descr="/tmp/pack-7qNEwO/other-andhrapradesh-0.png">    </p:cNvPr>
+          <p:cNvPr id="4" name="Image 0" descr="/tmp/pack-BpyxFC/other-andhrapradesh-0.png">    </p:cNvPr>
           <p:cNvPicPr>
             <a:picLocks noChangeAspect="1"/>
           </p:cNvPicPr>
@@ -5459,7 +5459,7 @@
       </p:sp>
       <p:pic>
         <p:nvPicPr>
-          <p:cNvPr id="4" name="Image 0" descr="/tmp/pack-7qNEwO/other-odisha-0.png">    </p:cNvPr>
+          <p:cNvPr id="4" name="Image 0" descr="/tmp/pack-BpyxFC/other-odisha-1.png">    </p:cNvPr>
           <p:cNvPicPr>
             <a:picLocks noChangeAspect="1"/>
           </p:cNvPicPr>
@@ -5473,8 +5473,8 @@
         </p:blipFill>
         <p:spPr>
           <a:xfrm>
-            <a:off x="1452545" y="1691640"/>
-            <a:ext cx="9286606" cy="4617720"/>
+            <a:off x="1439647" y="1691640"/>
+            <a:ext cx="9312402" cy="4617720"/>
           </a:xfrm>
           <a:prstGeom prst="rect">
             <a:avLst/>
@@ -5632,7 +5632,7 @@
       </p:sp>
       <p:pic>
         <p:nvPicPr>
-          <p:cNvPr id="4" name="Image 0" descr="/tmp/pack-7qNEwO/other-jharkhand-0.png">    </p:cNvPr>
+          <p:cNvPr id="4" name="Image 0" descr="/tmp/pack-BpyxFC/other-jharkhand-0.png">    </p:cNvPr>
           <p:cNvPicPr>
             <a:picLocks noChangeAspect="1"/>
           </p:cNvPicPr>
@@ -5805,7 +5805,7 @@
       </p:sp>
       <p:pic>
         <p:nvPicPr>
-          <p:cNvPr id="4" name="Image 0" descr="/tmp/pack-7qNEwO/other-haryana-0.png">    </p:cNvPr>
+          <p:cNvPr id="4" name="Image 0" descr="/tmp/pack-BpyxFC/other-haryana-0.png">    </p:cNvPr>
           <p:cNvPicPr>
             <a:picLocks noChangeAspect="1"/>
           </p:cNvPicPr>
@@ -5978,7 +5978,7 @@
       </p:sp>
       <p:pic>
         <p:nvPicPr>
-          <p:cNvPr id="4" name="Image 0" descr="/tmp/pack-7qNEwO/other-punjab-0.png">    </p:cNvPr>
+          <p:cNvPr id="4" name="Image 0" descr="/tmp/pack-BpyxFC/other-punjab-0.png">    </p:cNvPr>
           <p:cNvPicPr>
             <a:picLocks noChangeAspect="1"/>
           </p:cNvPicPr>
@@ -6151,7 +6151,7 @@
       </p:sp>
       <p:pic>
         <p:nvPicPr>
-          <p:cNvPr id="4" name="Image 0" descr="/tmp/pack-7qNEwO/other-goa-0.png">    </p:cNvPr>
+          <p:cNvPr id="4" name="Image 0" descr="/tmp/pack-BpyxFC/other-goa-0.png">    </p:cNvPr>
           <p:cNvPicPr>
             <a:picLocks noChangeAspect="1"/>
           </p:cNvPicPr>
